--- a/Жизненный цикл разработки ПО.pptx
+++ b/Жизненный цикл разработки ПО.pptx
@@ -3984,6 +3984,30 @@
           </a:p>
         </p:txBody>
       </p:sp>
+      <p:pic>
+        <p:nvPicPr>
+          <p:cNvPr id="4" name="Рисунок 3"/>
+          <p:cNvPicPr>
+            <a:picLocks noChangeAspect="1"/>
+          </p:cNvPicPr>
+          <p:nvPr/>
+        </p:nvPicPr>
+        <p:blipFill>
+          <a:blip r:embed="rId2"/>
+          <a:stretch>
+            <a:fillRect/>
+          </a:stretch>
+        </p:blipFill>
+        <p:spPr>
+          <a:xfrm>
+            <a:off x="1591807" y="3354731"/>
+            <a:ext cx="6944694" cy="3000794"/>
+          </a:xfrm>
+          <a:prstGeom prst="rect">
+            <a:avLst/>
+          </a:prstGeom>
+        </p:spPr>
+      </p:pic>
     </p:spTree>
     <p:extLst>
       <p:ext uri="{BB962C8B-B14F-4D97-AF65-F5344CB8AC3E}">
@@ -4065,6 +4089,30 @@
           </a:p>
         </p:txBody>
       </p:sp>
+      <p:pic>
+        <p:nvPicPr>
+          <p:cNvPr id="5" name="Рисунок 4"/>
+          <p:cNvPicPr>
+            <a:picLocks noChangeAspect="1"/>
+          </p:cNvPicPr>
+          <p:nvPr/>
+        </p:nvPicPr>
+        <p:blipFill>
+          <a:blip r:embed="rId2"/>
+          <a:stretch>
+            <a:fillRect/>
+          </a:stretch>
+        </p:blipFill>
+        <p:spPr>
+          <a:xfrm>
+            <a:off x="1600187" y="3305038"/>
+            <a:ext cx="5820587" cy="3200847"/>
+          </a:xfrm>
+          <a:prstGeom prst="rect">
+            <a:avLst/>
+          </a:prstGeom>
+        </p:spPr>
+      </p:pic>
     </p:spTree>
     <p:extLst>
       <p:ext uri="{BB962C8B-B14F-4D97-AF65-F5344CB8AC3E}">
@@ -4334,7 +4382,12 @@
             <p:ph type="title"/>
           </p:nvPr>
         </p:nvSpPr>
-        <p:spPr/>
+        <p:spPr>
+          <a:xfrm>
+            <a:off x="1371600" y="174072"/>
+            <a:ext cx="9601200" cy="1485900"/>
+          </a:xfrm>
+        </p:spPr>
         <p:txBody>
           <a:bodyPr/>
           <a:lstStyle/>
@@ -4360,7 +4413,12 @@
             <p:ph idx="1"/>
           </p:nvPr>
         </p:nvSpPr>
-        <p:spPr/>
+        <p:spPr>
+          <a:xfrm>
+            <a:off x="1371600" y="917022"/>
+            <a:ext cx="9601200" cy="3581400"/>
+          </a:xfrm>
+        </p:spPr>
         <p:txBody>
           <a:bodyPr/>
           <a:lstStyle/>
@@ -4381,6 +4439,30 @@
           </a:p>
         </p:txBody>
       </p:sp>
+      <p:pic>
+        <p:nvPicPr>
+          <p:cNvPr id="4" name="Рисунок 3"/>
+          <p:cNvPicPr>
+            <a:picLocks noChangeAspect="1"/>
+          </p:cNvPicPr>
+          <p:nvPr/>
+        </p:nvPicPr>
+        <p:blipFill>
+          <a:blip r:embed="rId2"/>
+          <a:stretch>
+            <a:fillRect/>
+          </a:stretch>
+        </p:blipFill>
+        <p:spPr>
+          <a:xfrm>
+            <a:off x="1813178" y="3112451"/>
+            <a:ext cx="4924921" cy="3397405"/>
+          </a:xfrm>
+          <a:prstGeom prst="rect">
+            <a:avLst/>
+          </a:prstGeom>
+        </p:spPr>
+      </p:pic>
     </p:spTree>
     <p:extLst>
       <p:ext uri="{BB962C8B-B14F-4D97-AF65-F5344CB8AC3E}">
@@ -4421,7 +4503,12 @@
             <p:ph type="title"/>
           </p:nvPr>
         </p:nvSpPr>
-        <p:spPr/>
+        <p:spPr>
+          <a:xfrm>
+            <a:off x="1312877" y="232795"/>
+            <a:ext cx="9601200" cy="1485900"/>
+          </a:xfrm>
+        </p:spPr>
         <p:txBody>
           <a:bodyPr>
             <a:normAutofit fontScale="90000"/>
@@ -4449,7 +4536,12 @@
             <p:ph idx="1"/>
           </p:nvPr>
         </p:nvSpPr>
-        <p:spPr/>
+        <p:spPr>
+          <a:xfrm>
+            <a:off x="1312877" y="1572936"/>
+            <a:ext cx="9601200" cy="3581400"/>
+          </a:xfrm>
+        </p:spPr>
         <p:txBody>
           <a:bodyPr/>
           <a:lstStyle/>
@@ -4495,6 +4587,30 @@
           </a:p>
         </p:txBody>
       </p:sp>
+      <p:pic>
+        <p:nvPicPr>
+          <p:cNvPr id="4" name="Рисунок 3"/>
+          <p:cNvPicPr>
+            <a:picLocks noChangeAspect="1"/>
+          </p:cNvPicPr>
+          <p:nvPr/>
+        </p:nvPicPr>
+        <p:blipFill>
+          <a:blip r:embed="rId2"/>
+          <a:stretch>
+            <a:fillRect/>
+          </a:stretch>
+        </p:blipFill>
+        <p:spPr>
+          <a:xfrm>
+            <a:off x="1539380" y="4464753"/>
+            <a:ext cx="3890979" cy="2336907"/>
+          </a:xfrm>
+          <a:prstGeom prst="rect">
+            <a:avLst/>
+          </a:prstGeom>
+        </p:spPr>
+      </p:pic>
     </p:spTree>
     <p:extLst>
       <p:ext uri="{BB962C8B-B14F-4D97-AF65-F5344CB8AC3E}">

--- a/Жизненный цикл разработки ПО.pptx
+++ b/Жизненный цикл разработки ПО.pptx
@@ -4506,23 +4506,23 @@
         <p:spPr>
           <a:xfrm>
             <a:off x="1312877" y="232795"/>
-            <a:ext cx="9601200" cy="1485900"/>
+            <a:ext cx="7646565" cy="1340141"/>
           </a:xfrm>
         </p:spPr>
         <p:txBody>
           <a:bodyPr>
-            <a:normAutofit fontScale="90000"/>
+            <a:noAutofit/>
           </a:bodyPr>
           <a:lstStyle/>
           <a:p>
             <a:r>
-              <a:rPr lang="ru-RU" dirty="0"/>
+              <a:rPr lang="ru-RU" sz="3200" dirty="0"/>
               <a:t>Этапы реализации и тестирования: от кода до готового продукта</a:t>
             </a:r>
             <a:br>
-              <a:rPr lang="ru-RU" dirty="0"/>
+              <a:rPr lang="ru-RU" sz="3200" dirty="0"/>
             </a:br>
-            <a:endParaRPr lang="ru-RU" dirty="0"/>
+            <a:endParaRPr lang="ru-RU" sz="3200" dirty="0"/>
           </a:p>
         </p:txBody>
       </p:sp>
@@ -4538,12 +4538,14 @@
         </p:nvSpPr>
         <p:spPr>
           <a:xfrm>
-            <a:off x="1312877" y="1572936"/>
-            <a:ext cx="9601200" cy="3581400"/>
-          </a:xfrm>
-        </p:spPr>
-        <p:txBody>
-          <a:bodyPr/>
+            <a:off x="1228987" y="1207171"/>
+            <a:ext cx="6555996" cy="2712297"/>
+          </a:xfrm>
+        </p:spPr>
+        <p:txBody>
+          <a:bodyPr>
+            <a:normAutofit fontScale="85000" lnSpcReduction="20000"/>
+          </a:bodyPr>
           <a:lstStyle/>
           <a:p>
             <a:pPr marL="0" indent="0">
@@ -4603,8 +4605,80 @@
         </p:blipFill>
         <p:spPr>
           <a:xfrm>
-            <a:off x="1539380" y="4464753"/>
-            <a:ext cx="3890979" cy="2336907"/>
+            <a:off x="4669227" y="3919468"/>
+            <a:ext cx="3045535" cy="1829136"/>
+          </a:xfrm>
+          <a:prstGeom prst="rect">
+            <a:avLst/>
+          </a:prstGeom>
+        </p:spPr>
+      </p:pic>
+      <p:pic>
+        <p:nvPicPr>
+          <p:cNvPr id="5" name="Рисунок 4"/>
+          <p:cNvPicPr>
+            <a:picLocks noChangeAspect="1"/>
+          </p:cNvPicPr>
+          <p:nvPr/>
+        </p:nvPicPr>
+        <p:blipFill>
+          <a:blip r:embed="rId3"/>
+          <a:stretch>
+            <a:fillRect/>
+          </a:stretch>
+        </p:blipFill>
+        <p:spPr>
+          <a:xfrm>
+            <a:off x="8013287" y="843739"/>
+            <a:ext cx="3931188" cy="2201465"/>
+          </a:xfrm>
+          <a:prstGeom prst="rect">
+            <a:avLst/>
+          </a:prstGeom>
+        </p:spPr>
+      </p:pic>
+      <p:pic>
+        <p:nvPicPr>
+          <p:cNvPr id="6" name="Рисунок 5"/>
+          <p:cNvPicPr>
+            <a:picLocks noChangeAspect="1"/>
+          </p:cNvPicPr>
+          <p:nvPr/>
+        </p:nvPicPr>
+        <p:blipFill>
+          <a:blip r:embed="rId4"/>
+          <a:stretch>
+            <a:fillRect/>
+          </a:stretch>
+        </p:blipFill>
+        <p:spPr>
+          <a:xfrm>
+            <a:off x="8013287" y="3372140"/>
+            <a:ext cx="3967714" cy="2042035"/>
+          </a:xfrm>
+          <a:prstGeom prst="rect">
+            <a:avLst/>
+          </a:prstGeom>
+        </p:spPr>
+      </p:pic>
+      <p:pic>
+        <p:nvPicPr>
+          <p:cNvPr id="7" name="Рисунок 6"/>
+          <p:cNvPicPr>
+            <a:picLocks noChangeAspect="1"/>
+          </p:cNvPicPr>
+          <p:nvPr/>
+        </p:nvPicPr>
+        <p:blipFill>
+          <a:blip r:embed="rId5"/>
+          <a:stretch>
+            <a:fillRect/>
+          </a:stretch>
+        </p:blipFill>
+        <p:spPr>
+          <a:xfrm>
+            <a:off x="1113912" y="3919468"/>
+            <a:ext cx="3327011" cy="1829136"/>
           </a:xfrm>
           <a:prstGeom prst="rect">
             <a:avLst/>
@@ -4923,7 +4997,12 @@
             <p:ph type="title"/>
           </p:nvPr>
         </p:nvSpPr>
-        <p:spPr/>
+        <p:spPr>
+          <a:xfrm>
+            <a:off x="1371600" y="283129"/>
+            <a:ext cx="9601200" cy="1485900"/>
+          </a:xfrm>
+        </p:spPr>
         <p:txBody>
           <a:bodyPr>
             <a:normAutofit fontScale="90000"/>
@@ -4955,7 +5034,12 @@
             <p:ph idx="1"/>
           </p:nvPr>
         </p:nvSpPr>
-        <p:spPr/>
+        <p:spPr>
+          <a:xfrm>
+            <a:off x="1438712" y="1497434"/>
+            <a:ext cx="9601200" cy="3581400"/>
+          </a:xfrm>
+        </p:spPr>
         <p:txBody>
           <a:bodyPr/>
           <a:lstStyle/>
@@ -4998,6 +5082,30 @@
           </a:p>
         </p:txBody>
       </p:sp>
+      <p:pic>
+        <p:nvPicPr>
+          <p:cNvPr id="4" name="Рисунок 3"/>
+          <p:cNvPicPr>
+            <a:picLocks noChangeAspect="1"/>
+          </p:cNvPicPr>
+          <p:nvPr/>
+        </p:nvPicPr>
+        <p:blipFill>
+          <a:blip r:embed="rId2"/>
+          <a:stretch>
+            <a:fillRect/>
+          </a:stretch>
+        </p:blipFill>
+        <p:spPr>
+          <a:xfrm>
+            <a:off x="1881351" y="3952984"/>
+            <a:ext cx="3403714" cy="2577708"/>
+          </a:xfrm>
+          <a:prstGeom prst="rect">
+            <a:avLst/>
+          </a:prstGeom>
+        </p:spPr>
+      </p:pic>
     </p:spTree>
     <p:extLst>
       <p:ext uri="{BB962C8B-B14F-4D97-AF65-F5344CB8AC3E}">
